--- a/outputs/GlassBox_UniHack_Deck.pptx
+++ b/outputs/GlassBox_UniHack_Deck.pptx
@@ -16165,7 +16165,7 @@
             </a:avLst>
           </a:prstGeom>
           <a:solidFill>
-            <a:srgbClr val="FDF6E7"/>
+            <a:srgbClr val="FFFFFF"/>
           </a:solidFill>
           <a:ln w="9525">
             <a:solidFill>
@@ -16206,7 +16206,7 @@
             <a:r>
               <a:rPr sz="850" b="1" i="0">
                 <a:solidFill>
-                  <a:srgbClr val="B47A0A"/>
+                  <a:srgbClr val="0E8F69"/>
                 </a:solidFill>
                 <a:latin typeface="Calibri"/>
               </a:rPr>
@@ -16226,13 +16226,13 @@
               </a:spcAft>
             </a:pPr>
             <a:r>
-              <a:rPr sz="1200" b="0" i="0">
-                <a:solidFill>
-                  <a:srgbClr val="B47A0A"/>
+              <a:rPr sz="1200" b="1" i="0">
+                <a:solidFill>
+                  <a:srgbClr val="1A1F25"/>
                 </a:solidFill>
                 <a:latin typeface="Calibri"/>
               </a:rPr>
-              <a:t>&lt;paste your Streamlit / Hugging Face Space URL&gt;</a:t>
+              <a:t>https://glassbox-unihack.streamlit.app/</a:t>
             </a:r>
           </a:p>
         </p:txBody>
@@ -16315,13 +16315,13 @@
               </a:spcAft>
             </a:pPr>
             <a:r>
-              <a:rPr sz="1200" b="0" i="0">
+              <a:rPr sz="1100" b="0" i="0">
                 <a:solidFill>
                   <a:srgbClr val="B47A0A"/>
                 </a:solidFill>
                 <a:latin typeface="Calibri"/>
               </a:rPr>
-              <a:t>&lt;paste your unlisted YouTube URL&gt;</a:t>
+              <a:t>Submitted alongside this deck on the Hack2skill portal</a:t>
             </a:r>
           </a:p>
         </p:txBody>
@@ -17493,7 +17493,7 @@
                 </a:solidFill>
                 <a:latin typeface="Calibri"/>
               </a:rPr>
-              <a:t>204</a:t>
+              <a:t>214</a:t>
             </a:r>
           </a:p>
           <a:p>
@@ -18898,7 +18898,7 @@
                 </a:solidFill>
                 <a:latin typeface="Calibri"/>
               </a:rPr>
-              <a:t>204/s</a:t>
+              <a:t>214/s</a:t>
             </a:r>
           </a:p>
           <a:p>
